--- a/chapter11/parts/part-06-weak-supervision-techniques/clip.pptx
+++ b/chapter11/parts/part-06-weak-supervision-techniques/clip.pptx
@@ -4327,10 +4327,12 @@
           </a:bodyPr>
           <a:lstStyle/>
           <a:p>
-            <a:pPr>
+            <a:pPr lvl="0" marL="457200" indent="-228600">
+              <a:buFont typeface="Calibri"/>
               <a:spcAft>
                 <a:spcPts val="1000"/>
               </a:spcAft>
+              <a:buSzPct val="100000"/>
               <a:buChar char="•"/>
               <a:lnSpc>
                 <a:spcPts val="2200"/>
@@ -4347,10 +4349,12 @@
             </a:r>
           </a:p>
           <a:p>
-            <a:pPr>
+            <a:pPr lvl="0" marL="457200" indent="-228600">
+              <a:buFont typeface="Calibri"/>
               <a:spcAft>
                 <a:spcPts val="1000"/>
               </a:spcAft>
+              <a:buSzPct val="100000"/>
               <a:buChar char="•"/>
               <a:lnSpc>
                 <a:spcPts val="2200"/>
@@ -4367,10 +4371,12 @@
             </a:r>
           </a:p>
           <a:p>
-            <a:pPr>
+            <a:pPr lvl="0" marL="457200" indent="-228600">
+              <a:buFont typeface="Calibri"/>
               <a:spcAft>
                 <a:spcPts val="1000"/>
               </a:spcAft>
+              <a:buSzPct val="100000"/>
               <a:buChar char="•"/>
               <a:lnSpc>
                 <a:spcPts val="2200"/>
@@ -4506,10 +4512,12 @@
           </a:bodyPr>
           <a:lstStyle/>
           <a:p>
-            <a:pPr>
+            <a:pPr lvl="0" marL="457200" indent="-228600">
+              <a:buFont typeface="Calibri"/>
               <a:spcAft>
                 <a:spcPts val="1000"/>
               </a:spcAft>
+              <a:buSzPct val="100000"/>
               <a:buChar char="•"/>
               <a:lnSpc>
                 <a:spcPts val="2200"/>
@@ -4526,10 +4534,12 @@
             </a:r>
           </a:p>
           <a:p>
-            <a:pPr>
+            <a:pPr lvl="0" marL="457200" indent="-228600">
+              <a:buFont typeface="Calibri"/>
               <a:spcAft>
                 <a:spcPts val="1000"/>
               </a:spcAft>
+              <a:buSzPct val="100000"/>
               <a:buChar char="•"/>
               <a:lnSpc>
                 <a:spcPts val="2200"/>
@@ -4665,10 +4675,12 @@
           </a:bodyPr>
           <a:lstStyle/>
           <a:p>
-            <a:pPr>
+            <a:pPr lvl="0" marL="457200" indent="-228600">
+              <a:buFont typeface="Calibri"/>
               <a:spcAft>
                 <a:spcPts val="1000"/>
               </a:spcAft>
+              <a:buSzPct val="100000"/>
               <a:buChar char="•"/>
               <a:lnSpc>
                 <a:spcPts val="2200"/>
@@ -4804,10 +4816,12 @@
           </a:bodyPr>
           <a:lstStyle/>
           <a:p>
-            <a:pPr>
+            <a:pPr lvl="0" marL="457200" indent="-228600">
+              <a:buFont typeface="Calibri"/>
               <a:spcAft>
                 <a:spcPts val="1000"/>
               </a:spcAft>
+              <a:buSzPct val="100000"/>
               <a:buChar char="•"/>
               <a:lnSpc>
                 <a:spcPts val="2200"/>
@@ -4824,10 +4838,12 @@
             </a:r>
           </a:p>
           <a:p>
-            <a:pPr>
+            <a:pPr lvl="0" marL="457200" indent="-228600">
+              <a:buFont typeface="Calibri"/>
               <a:spcAft>
                 <a:spcPts val="1000"/>
               </a:spcAft>
+              <a:buSzPct val="100000"/>
               <a:buChar char="•"/>
               <a:lnSpc>
                 <a:spcPts val="2200"/>
@@ -4844,10 +4860,12 @@
             </a:r>
           </a:p>
           <a:p>
-            <a:pPr>
+            <a:pPr lvl="0" marL="457200" indent="-228600">
+              <a:buFont typeface="Calibri"/>
               <a:spcAft>
                 <a:spcPts val="1000"/>
               </a:spcAft>
+              <a:buSzPct val="100000"/>
               <a:buChar char="•"/>
               <a:lnSpc>
                 <a:spcPts val="2200"/>
@@ -4983,10 +5001,12 @@
           </a:bodyPr>
           <a:lstStyle/>
           <a:p>
-            <a:pPr>
+            <a:pPr lvl="0" marL="457200" indent="-228600">
+              <a:buFont typeface="Calibri"/>
               <a:spcAft>
                 <a:spcPts val="1000"/>
               </a:spcAft>
+              <a:buSzPct val="100000"/>
               <a:buChar char="•"/>
               <a:lnSpc>
                 <a:spcPts val="2200"/>
@@ -5003,10 +5023,12 @@
             </a:r>
           </a:p>
           <a:p>
-            <a:pPr>
+            <a:pPr lvl="0" marL="457200" indent="-228600">
+              <a:buFont typeface="Calibri"/>
               <a:spcAft>
                 <a:spcPts val="1000"/>
               </a:spcAft>
+              <a:buSzPct val="100000"/>
               <a:buChar char="•"/>
               <a:lnSpc>
                 <a:spcPts val="2200"/>
@@ -5023,10 +5045,12 @@
             </a:r>
           </a:p>
           <a:p>
-            <a:pPr>
+            <a:pPr lvl="0" marL="457200" indent="-228600">
+              <a:buFont typeface="Calibri"/>
               <a:spcAft>
                 <a:spcPts val="1000"/>
               </a:spcAft>
+              <a:buSzPct val="100000"/>
               <a:buChar char="•"/>
               <a:lnSpc>
                 <a:spcPts val="2200"/>
@@ -5043,10 +5067,12 @@
             </a:r>
           </a:p>
           <a:p>
-            <a:pPr>
+            <a:pPr lvl="0" marL="457200" indent="-228600">
+              <a:buFont typeface="Calibri"/>
               <a:spcAft>
                 <a:spcPts val="1000"/>
               </a:spcAft>
+              <a:buSzPct val="100000"/>
               <a:buChar char="•"/>
               <a:lnSpc>
                 <a:spcPts val="2200"/>
@@ -5063,10 +5089,12 @@
             </a:r>
           </a:p>
           <a:p>
-            <a:pPr>
+            <a:pPr lvl="0" marL="457200" indent="-228600">
+              <a:buFont typeface="Calibri"/>
               <a:spcAft>
                 <a:spcPts val="1000"/>
               </a:spcAft>
+              <a:buSzPct val="100000"/>
               <a:buChar char="•"/>
               <a:lnSpc>
                 <a:spcPts val="2200"/>
@@ -5665,10 +5693,12 @@
           </a:bodyPr>
           <a:lstStyle/>
           <a:p>
-            <a:pPr>
+            <a:pPr lvl="0" marL="457200" indent="-228600">
+              <a:buFont typeface="Calibri"/>
               <a:spcAft>
                 <a:spcPts val="1000"/>
               </a:spcAft>
+              <a:buSzPct val="100000"/>
               <a:buChar char="•"/>
               <a:lnSpc>
                 <a:spcPts val="2200"/>
@@ -5685,10 +5715,12 @@
             </a:r>
           </a:p>
           <a:p>
-            <a:pPr>
+            <a:pPr lvl="0" marL="457200" indent="-228600">
+              <a:buFont typeface="Calibri"/>
               <a:spcAft>
                 <a:spcPts val="1000"/>
               </a:spcAft>
+              <a:buSzPct val="100000"/>
               <a:buChar char="•"/>
               <a:lnSpc>
                 <a:spcPts val="2200"/>
@@ -5705,10 +5737,12 @@
             </a:r>
           </a:p>
           <a:p>
-            <a:pPr>
+            <a:pPr lvl="0" marL="457200" indent="-228600">
+              <a:buFont typeface="Calibri"/>
               <a:spcAft>
                 <a:spcPts val="1000"/>
               </a:spcAft>
+              <a:buSzPct val="100000"/>
               <a:buChar char="•"/>
               <a:lnSpc>
                 <a:spcPts val="2200"/>
@@ -5844,10 +5878,12 @@
           </a:bodyPr>
           <a:lstStyle/>
           <a:p>
-            <a:pPr>
+            <a:pPr lvl="0" marL="457200" indent="-228600">
+              <a:buFont typeface="Calibri"/>
               <a:spcAft>
                 <a:spcPts val="1000"/>
               </a:spcAft>
+              <a:buSzPct val="100000"/>
               <a:buChar char="•"/>
               <a:lnSpc>
                 <a:spcPts val="2200"/>
@@ -5864,10 +5900,12 @@
             </a:r>
           </a:p>
           <a:p>
-            <a:pPr>
+            <a:pPr lvl="0" marL="457200" indent="-228600">
+              <a:buFont typeface="Calibri"/>
               <a:spcAft>
                 <a:spcPts val="1000"/>
               </a:spcAft>
+              <a:buSzPct val="100000"/>
               <a:buChar char="•"/>
               <a:lnSpc>
                 <a:spcPts val="2200"/>
@@ -5884,10 +5922,12 @@
             </a:r>
           </a:p>
           <a:p>
-            <a:pPr>
+            <a:pPr lvl="0" marL="457200" indent="-228600">
+              <a:buFont typeface="Calibri"/>
               <a:spcAft>
                 <a:spcPts val="1000"/>
               </a:spcAft>
+              <a:buSzPct val="100000"/>
               <a:buChar char="•"/>
               <a:lnSpc>
                 <a:spcPts val="2200"/>
@@ -6023,10 +6063,12 @@
           </a:bodyPr>
           <a:lstStyle/>
           <a:p>
-            <a:pPr>
+            <a:pPr lvl="0" marL="457200" indent="-228600">
+              <a:buFont typeface="Calibri"/>
               <a:spcAft>
                 <a:spcPts val="1000"/>
               </a:spcAft>
+              <a:buSzPct val="100000"/>
               <a:buChar char="•"/>
               <a:lnSpc>
                 <a:spcPts val="2200"/>
@@ -6043,10 +6085,12 @@
             </a:r>
           </a:p>
           <a:p>
-            <a:pPr>
+            <a:pPr lvl="0" marL="457200" indent="-228600">
+              <a:buFont typeface="Calibri"/>
               <a:spcAft>
                 <a:spcPts val="1000"/>
               </a:spcAft>
+              <a:buSzPct val="100000"/>
               <a:buChar char="•"/>
               <a:lnSpc>
                 <a:spcPts val="2200"/>
@@ -6063,10 +6107,12 @@
             </a:r>
           </a:p>
           <a:p>
-            <a:pPr>
+            <a:pPr lvl="0" marL="457200" indent="-228600">
+              <a:buFont typeface="Calibri"/>
               <a:spcAft>
                 <a:spcPts val="1000"/>
               </a:spcAft>
+              <a:buSzPct val="100000"/>
               <a:buChar char="•"/>
               <a:lnSpc>
                 <a:spcPts val="2200"/>
@@ -6202,10 +6248,12 @@
           </a:bodyPr>
           <a:lstStyle/>
           <a:p>
-            <a:pPr>
+            <a:pPr lvl="0" marL="457200" indent="-228600">
+              <a:buFont typeface="Calibri"/>
               <a:spcAft>
                 <a:spcPts val="1000"/>
               </a:spcAft>
+              <a:buSzPct val="100000"/>
               <a:buChar char="•"/>
               <a:lnSpc>
                 <a:spcPts val="2200"/>
@@ -6222,10 +6270,12 @@
             </a:r>
           </a:p>
           <a:p>
-            <a:pPr>
+            <a:pPr lvl="0" marL="457200" indent="-228600">
+              <a:buFont typeface="Calibri"/>
               <a:spcAft>
                 <a:spcPts val="1000"/>
               </a:spcAft>
+              <a:buSzPct val="100000"/>
               <a:buChar char="•"/>
               <a:lnSpc>
                 <a:spcPts val="2200"/>
@@ -6242,10 +6292,12 @@
             </a:r>
           </a:p>
           <a:p>
-            <a:pPr>
+            <a:pPr lvl="0" marL="457200" indent="-228600">
+              <a:buFont typeface="Calibri"/>
               <a:spcAft>
                 <a:spcPts val="1000"/>
               </a:spcAft>
+              <a:buSzPct val="100000"/>
               <a:buChar char="•"/>
               <a:lnSpc>
                 <a:spcPts val="2200"/>
